--- a/docs/graduation2026/slides.pptx
+++ b/docs/graduation2026/slides.pptx
@@ -957,7 +957,7 @@
           </a:p>
           <a:p>
             <a:r>
-              <a:t>・主L3を成功基準とする</a:t>
+              <a:t>・L3を成功基準とする</a:t>
             </a:r>
           </a:p>
           <a:p>
@@ -4614,29 +4614,29 @@
               </a:spcAft>
             </a:pPr>
             <a:r>
-              <a:rPr sz="3600" b="1" lang="ja-JP">
+              <a:rPr sz="2800" b="1" lang="ja-JP">
                 <a:solidFill>
                   <a:srgbClr val="171717"/>
                 </a:solidFill>
                 <a:latin typeface="IPAexGothic"/>
               </a:rPr>
-              <a:t>Qiskit量子回路コードの</a:t>
-            </a:r>
-          </a:p>
-          <a:p>
-            <a:pPr>
-              <a:spcAft>
-                <a:spcPts val="1000"/>
-              </a:spcAft>
-            </a:pPr>
-            <a:r>
-              <a:rPr sz="3600" b="1" lang="ja-JP">
+              <a:t>量子LLM支援プログラミングにおける</a:t>
+            </a:r>
+          </a:p>
+          <a:p>
+            <a:pPr>
+              <a:spcAft>
+                <a:spcPts val="1000"/>
+              </a:spcAft>
+            </a:pPr>
+            <a:r>
+              <a:rPr sz="2800" b="1" lang="ja-JP">
                 <a:solidFill>
                   <a:srgbClr val="171717"/>
                 </a:solidFill>
                 <a:latin typeface="IPAexGothic"/>
               </a:rPr>
-              <a:t>修正介入と救済対象の分析</a:t>
+              <a:t>失敗類型と介入カタログの実証研究</a:t>
             </a:r>
           </a:p>
         </p:txBody>
@@ -4955,7 +4955,7 @@
                 </a:solidFill>
                 <a:latin typeface="IPAexGothic"/>
               </a:rPr>
-              <a:t>主L3：指定入力の出力＋所定の構造要件</a:t>
+              <a:t>L3：指定入力の出力＋所定の構造要件</a:t>
             </a:r>
           </a:p>
           <a:p>
